--- a/modulo-05/05.08 - Visão Geral do Conceito de Navegação em Apps SAP Fiori Elements/05.08_Navegação_em_apps_Fiori_elements.pptx
+++ b/modulo-05/05.08 - Visão Geral do Conceito de Navegação em Apps SAP Fiori Elements/05.08_Navegação_em_apps_Fiori_elements.pptx
@@ -1461,7 +1461,7 @@
                   <a:srgbClr val="8FA3C7"/>
                 </a:solidFill>
               </a:rPr>
-              <a:t>ABAP Moderno · Módulo 03 — SAP Fiori Elements com OData V4  ·  Aula 8 de 11 — Navegação</a:t>
+              <a:t>ABAP Moderno · Módulo 05 — SAP Fiori Elements com OData V4  ·  Aula 8 de 11 — Navegação</a:t>
             </a:r>
             <a:endParaRPr lang="en-US" sz="900" dirty="0"/>
           </a:p>
@@ -1607,7 +1607,7 @@
                   <a:srgbClr val="556B82"/>
                 </a:solidFill>
               </a:rPr>
-              <a:t>ABAP Moderno · Módulo 03 — SAP Fiori Elements com OData V4  ·  Aula 8 de 11 — Navegação</a:t>
+              <a:t>ABAP Moderno · Módulo 05 — SAP Fiori Elements com OData V4  ·  Aula 8 de 11 — Navegação</a:t>
             </a:r>
             <a:endParaRPr lang="en-US" sz="900" dirty="0"/>
           </a:p>
@@ -2038,7 +2038,7 @@
                   <a:srgbClr val="89D1FF"/>
                 </a:solidFill>
               </a:rPr>
-              <a:t>MÓDULO 03 · AULA 08 DE 11</a:t>
+              <a:t>MÓDULO 05 · AULA 08 DE 11</a:t>
             </a:r>
             <a:endParaRPr lang="en-US" sz="1400" dirty="0"/>
           </a:p>
@@ -2468,7 +2468,7 @@
                   <a:srgbClr val="8FA3C7"/>
                 </a:solidFill>
               </a:rPr>
-              <a:t>ABAP Moderno · Módulo 03 — SAP Fiori Elements com OData V4 · Design System SAP Horizon</a:t>
+              <a:t>ABAP Moderno · Módulo 05 — SAP Fiori Elements com OData V4 · Design System SAP Horizon</a:t>
             </a:r>
             <a:endParaRPr lang="en-US" sz="1100" dirty="0"/>
           </a:p>
@@ -2589,7 +2589,7 @@
                   <a:srgbClr val="FFFFFF"/>
                 </a:solidFill>
               </a:rPr>
-              <a:t>O que aprendemos na aula 03.08</a:t>
+              <a:t>O que aprendemos na aula 05.08</a:t>
             </a:r>
             <a:endParaRPr lang="en-US" sz="3200" dirty="0"/>
           </a:p>
@@ -2830,7 +2830,7 @@
                   <a:srgbClr val="FFFFFF"/>
                 </a:solidFill>
               </a:rPr>
-              <a:t>A tabela de Bookings navega para uma </a:t>
+              <a:t>A tabela de Itens navega para uma </a:t>
             </a:r>
             <a:r>
               <a:rPr lang="en-US" sz="1400" b="1" dirty="0">
@@ -2857,7 +2857,7 @@
                 <a:ea typeface="Courier New" pitchFamily="34" charset="-122"/>
                 <a:cs typeface="Courier New" pitchFamily="34" charset="-120"/>
               </a:rPr>
-              <a:t>_Booking</a:t>
+              <a:t>_Itens</a:t>
             </a:r>
             <a:endParaRPr lang="en-US" sz="1400" dirty="0"/>
           </a:p>
@@ -3183,7 +3183,7 @@
                   <a:srgbClr val="89D1FF"/>
                 </a:solidFill>
               </a:rPr>
-              <a:t>Próxima aula · 03.09  </a:t>
+              <a:t>Próxima aula · 05.09  </a:t>
             </a:r>
             <a:r>
               <a:rPr lang="en-US" sz="1500" dirty="0">
@@ -3285,7 +3285,7 @@
         </p:blipFill>
         <p:spPr>
           <a:xfrm>
-            <a:off x="822960" y="3886200"/>
+            <a:off x="6355080" y="2926080"/>
             <a:ext cx="256032" cy="256032"/>
           </a:xfrm>
           <a:prstGeom prst="rect">
@@ -3309,7 +3309,7 @@
         </p:blipFill>
         <p:spPr>
           <a:xfrm>
-            <a:off x="6355080" y="2926080"/>
+            <a:off x="822960" y="3886200"/>
             <a:ext cx="256032" cy="256032"/>
           </a:xfrm>
           <a:prstGeom prst="rect">
@@ -3460,7 +3460,7 @@
                   <a:srgbClr val="1D2D3E"/>
                 </a:solidFill>
               </a:rPr>
-              <a:t>Módulo 03 em 11 aulas: Fiori Elements com OData V4</a:t>
+              <a:t>Módulo 05 em 11 aulas: Fiori Elements com OData V4</a:t>
             </a:r>
             <a:endParaRPr lang="en-US" sz="2800" dirty="0"/>
           </a:p>
@@ -5330,7 +5330,7 @@
                   <a:srgbClr val="1D2D3E"/>
                 </a:solidFill>
               </a:rPr>
-              <a:t>levamos o usuário da viagem até o booking dentro do app e de um cliente para outro app pelo launchpad.</a:t>
+              <a:t>levamos o usuário do pedido até o item dentro do app e, pelo launchpad, do pedido para o cliente na app Gestão de Clientes.</a:t>
             </a:r>
             <a:endParaRPr lang="en-US" sz="1400" dirty="0"/>
           </a:p>
@@ -5424,7 +5424,7 @@
         </p:blipFill>
         <p:spPr>
           <a:xfrm>
-            <a:off x="7335317" y="1847088"/>
+            <a:off x="9214866" y="1847088"/>
             <a:ext cx="347472" cy="347472"/>
           </a:xfrm>
           <a:prstGeom prst="rect">
@@ -5448,7 +5448,7 @@
         </p:blipFill>
         <p:spPr>
           <a:xfrm>
-            <a:off x="11094415" y="1847088"/>
+            <a:off x="7335317" y="1847088"/>
             <a:ext cx="347472" cy="347472"/>
           </a:xfrm>
           <a:prstGeom prst="rect">
@@ -5472,7 +5472,7 @@
         </p:blipFill>
         <p:spPr>
           <a:xfrm>
-            <a:off x="9214866" y="1847088"/>
+            <a:off x="11094415" y="1847088"/>
             <a:ext cx="347472" cy="347472"/>
           </a:xfrm>
           <a:prstGeom prst="rect">
@@ -5496,7 +5496,7 @@
         </p:blipFill>
         <p:spPr>
           <a:xfrm>
-            <a:off x="1696669" y="3858768"/>
+            <a:off x="3576218" y="3858768"/>
             <a:ext cx="347472" cy="347472"/>
           </a:xfrm>
           <a:prstGeom prst="rect">
@@ -5520,7 +5520,7 @@
         </p:blipFill>
         <p:spPr>
           <a:xfrm>
-            <a:off x="3576218" y="3858768"/>
+            <a:off x="1696669" y="3858768"/>
             <a:ext cx="347472" cy="347472"/>
           </a:xfrm>
           <a:prstGeom prst="rect">
@@ -5568,7 +5568,7 @@
         </p:blipFill>
         <p:spPr>
           <a:xfrm>
-            <a:off x="7335317" y="3858768"/>
+            <a:off x="9214866" y="3858768"/>
             <a:ext cx="347472" cy="347472"/>
           </a:xfrm>
           <a:prstGeom prst="rect">
@@ -5592,7 +5592,7 @@
         </p:blipFill>
         <p:spPr>
           <a:xfrm>
-            <a:off x="9214866" y="3858768"/>
+            <a:off x="7335317" y="3858768"/>
             <a:ext cx="347472" cy="347472"/>
           </a:xfrm>
           <a:prstGeom prst="rect">
@@ -6131,7 +6131,7 @@
                   <a:srgbClr val="1D2D3E"/>
                 </a:solidFill>
               </a:rPr>
-              <a:t>De um app para outro, como Travel → Customer</a:t>
+              <a:t>De um app para outro, como Pedido → Cliente</a:t>
             </a:r>
             <a:endParaRPr lang="en-US" sz="1400" dirty="0"/>
           </a:p>
@@ -6367,7 +6367,7 @@
                   <a:srgbClr val="89D1FF"/>
                 </a:solidFill>
               </a:rPr>
-              <a:t>AULA 03.08 · SEÇÃO 1</a:t>
+              <a:t>AULA 05.08 · SEÇÃO 1</a:t>
             </a:r>
             <a:endParaRPr lang="en-US" sz="1300" dirty="0"/>
           </a:p>
@@ -6654,7 +6654,7 @@
                   <a:srgbClr val="D1EFFF"/>
                 </a:solidFill>
               </a:rPr>
-              <a:t>  Booking</a:t>
+              <a:t>  ItemPedido</a:t>
             </a:r>
             <a:endParaRPr lang="en-US" sz="1400" dirty="0"/>
           </a:p>
@@ -6788,7 +6788,7 @@
                   <a:srgbClr val="0064D9"/>
                 </a:solidFill>
               </a:rPr>
-              <a:t>INTERNA · EXERCÍCIO DO CURSO</a:t>
+              <a:t>INTERNA · NO PROJETO</a:t>
             </a:r>
             <a:endParaRPr lang="en-US" sz="1100" dirty="0"/>
           </a:p>
@@ -6826,7 +6826,7 @@
                   <a:srgbClr val="1D2D3E"/>
                 </a:solidFill>
               </a:rPr>
-              <a:t>Da lista de viagens ao detalhe do booking</a:t>
+              <a:t>Da lista de pedidos ao detalhe do item</a:t>
             </a:r>
             <a:endParaRPr lang="en-US" sz="2800" dirty="0"/>
           </a:p>
@@ -6913,7 +6913,7 @@
                   <a:srgbClr val="556B82"/>
                 </a:solidFill>
               </a:rPr>
-              <a:t>Travels</a:t>
+              <a:t>Pedidos de compras</a:t>
             </a:r>
             <a:endParaRPr lang="en-US" sz="1400" dirty="0"/>
           </a:p>
@@ -7020,7 +7020,7 @@
                   <a:srgbClr val="556B82"/>
                 </a:solidFill>
               </a:rPr>
-              <a:t>Travel com tabela de Bookings</a:t>
+              <a:t>Pedido com a tabela de Itens</a:t>
             </a:r>
             <a:endParaRPr lang="en-US" sz="1400" dirty="0"/>
           </a:p>
@@ -7127,7 +7127,7 @@
                   <a:srgbClr val="556B82"/>
                 </a:solidFill>
               </a:rPr>
-              <a:t>Booking: voo, horários, aeroportos</a:t>
+              <a:t>Item: produto, quantidade e valor</a:t>
             </a:r>
             <a:endParaRPr lang="en-US" sz="1400" dirty="0"/>
           </a:p>
@@ -7236,7 +7236,7 @@
                   <a:srgbClr val="556B82"/>
                 </a:solidFill>
               </a:rPr>
-              <a:t>Na tabela Bookings, adicionar navegação para uma nova página do tipo </a:t>
+              <a:t>Na tabela Itens, adicionar navegação para uma nova página do tipo </a:t>
             </a:r>
             <a:r>
               <a:rPr lang="en-US" sz="1200" b="1" dirty="0">
@@ -7252,7 +7252,7 @@
                   <a:srgbClr val="556B82"/>
                 </a:solidFill>
               </a:rPr>
-              <a:t> da entidade Booking.</a:t>
+              <a:t> da entidade ItemPedido.</a:t>
             </a:r>
             <a:endParaRPr lang="en-US" sz="1400" dirty="0"/>
           </a:p>
@@ -7508,8 +7508,8 @@
         </p:blipFill>
         <p:spPr>
           <a:xfrm>
-            <a:off x="2077669" y="2084832"/>
-            <a:ext cx="365760" cy="365760"/>
+            <a:off x="4594372" y="3928994"/>
+            <a:ext cx="225308" cy="225308"/>
           </a:xfrm>
           <a:prstGeom prst="rect">
             <a:avLst/>
@@ -7532,8 +7532,8 @@
         </p:blipFill>
         <p:spPr>
           <a:xfrm>
-            <a:off x="5912968" y="2084832"/>
-            <a:ext cx="365760" cy="365760"/>
+            <a:off x="8368711" y="3928994"/>
+            <a:ext cx="225308" cy="225308"/>
           </a:xfrm>
           <a:prstGeom prst="rect">
             <a:avLst/>
@@ -7556,7 +7556,7 @@
         </p:blipFill>
         <p:spPr>
           <a:xfrm>
-            <a:off x="9748266" y="2084832"/>
+            <a:off x="2077669" y="2084832"/>
             <a:ext cx="365760" cy="365760"/>
           </a:xfrm>
           <a:prstGeom prst="rect">
@@ -7580,8 +7580,8 @@
         </p:blipFill>
         <p:spPr>
           <a:xfrm>
-            <a:off x="820034" y="3928994"/>
-            <a:ext cx="225308" cy="225308"/>
+            <a:off x="9748266" y="2084832"/>
+            <a:ext cx="365760" cy="365760"/>
           </a:xfrm>
           <a:prstGeom prst="rect">
             <a:avLst/>
@@ -7604,7 +7604,7 @@
         </p:blipFill>
         <p:spPr>
           <a:xfrm>
-            <a:off x="4594372" y="3928994"/>
+            <a:off x="820034" y="3928994"/>
             <a:ext cx="225308" cy="225308"/>
           </a:xfrm>
           <a:prstGeom prst="rect">
@@ -7628,8 +7628,8 @@
         </p:blipFill>
         <p:spPr>
           <a:xfrm>
-            <a:off x="8368711" y="3928994"/>
-            <a:ext cx="225308" cy="225308"/>
+            <a:off x="5912968" y="2084832"/>
+            <a:ext cx="365760" cy="365760"/>
           </a:xfrm>
           <a:prstGeom prst="rect">
             <a:avLst/>
@@ -7776,7 +7776,7 @@
                   <a:srgbClr val="1D2D3E"/>
                 </a:solidFill>
               </a:rPr>
-              <a:t>A navegação do Travel para o Booking</a:t>
+              <a:t>A navegação do pedido para o item</a:t>
             </a:r>
             <a:endParaRPr lang="en-US" sz="2800" dirty="0"/>
           </a:p>
@@ -7937,7 +7937,7 @@
                   <a:srgbClr val="9DA5B4"/>
                 </a:solidFill>
               </a:rPr>
-              <a:t>travels › webapp</a:t>
+              <a:t>pedidos-compras › webapp (trecho)</a:t>
             </a:r>
             <a:endParaRPr lang="en-US" sz="850" dirty="0"/>
           </a:p>
@@ -8314,7 +8314,7 @@
                 <a:ea typeface="Courier New" pitchFamily="34" charset="-122"/>
                 <a:cs typeface="Courier New" pitchFamily="34" charset="-120"/>
               </a:rPr>
-              <a:t>"pattern": ":?query:", "name": "TravelList", "target": "TravelList" },</a:t>
+              <a:t>"pattern": ":?query:", "name": "PedidoList", "target": "PedidoList" },</a:t>
             </a:r>
             <a:endParaRPr lang="en-US" sz="900" dirty="0"/>
           </a:p>
@@ -8367,7 +8367,7 @@
                 <a:ea typeface="Courier New" pitchFamily="34" charset="-122"/>
                 <a:cs typeface="Courier New" pitchFamily="34" charset="-120"/>
               </a:rPr>
-              <a:t>"pattern": "Travel({key}):?query:", "name": "TravelObjectPage",</a:t>
+              <a:t>"pattern": "Pedido({key}):?query:", "name": "PedidoObjectPage",</a:t>
             </a:r>
             <a:endParaRPr lang="en-US" sz="900" dirty="0"/>
           </a:p>
@@ -8398,7 +8398,7 @@
                 <a:ea typeface="Courier New" pitchFamily="34" charset="-122"/>
                 <a:cs typeface="Courier New" pitchFamily="34" charset="-120"/>
               </a:rPr>
-              <a:t>"target": "TravelObjectPage" },</a:t>
+              <a:t>"target": "PedidoObjectPage" },</a:t>
             </a:r>
             <a:endParaRPr lang="en-US" sz="900" dirty="0"/>
           </a:p>
@@ -8451,7 +8451,7 @@
                 <a:ea typeface="Courier New" pitchFamily="34" charset="-122"/>
                 <a:cs typeface="Courier New" pitchFamily="34" charset="-120"/>
               </a:rPr>
-              <a:t>"pattern": "Travel({key})/_Booking({key2}):?query:",</a:t>
+              <a:t>"pattern": "Pedido({key})/_Itens({_ItensKey}):?query:",</a:t>
             </a:r>
             <a:endParaRPr lang="en-US" sz="900" dirty="0"/>
           </a:p>
@@ -8482,7 +8482,7 @@
                 <a:ea typeface="Courier New" pitchFamily="34" charset="-122"/>
                 <a:cs typeface="Courier New" pitchFamily="34" charset="-120"/>
               </a:rPr>
-              <a:t>"name": "BookingObjectPage", "target": "BookingObjectPage" }</a:t>
+              <a:t>"name": "Pedido__ItensObjectPage", "target": "Pedido__ItensObjectPage" }</a:t>
             </a:r>
             <a:endParaRPr lang="en-US" sz="900" dirty="0"/>
           </a:p>
@@ -8533,7 +8533,7 @@
                 <a:ea typeface="Courier New" pitchFamily="34" charset="-122"/>
                 <a:cs typeface="Courier New" pitchFamily="34" charset="-120"/>
               </a:rPr>
-              <a:t>"TravelObjectPage": { "options": { "settings": {</a:t>
+              <a:t>"PedidoObjectPage": { "options": { "settings": {</a:t>
             </a:r>
             <a:endParaRPr lang="en-US" sz="900" dirty="0"/>
           </a:p>
@@ -8564,7 +8564,7 @@
                 <a:ea typeface="Courier New" pitchFamily="34" charset="-122"/>
                 <a:cs typeface="Courier New" pitchFamily="34" charset="-120"/>
               </a:rPr>
-              <a:t>"contextPath": "/Travel",</a:t>
+              <a:t>"contextPath": "/Pedido",</a:t>
             </a:r>
             <a:endParaRPr lang="en-US" sz="900" dirty="0"/>
           </a:p>
@@ -8626,7 +8626,7 @@
                 <a:ea typeface="Courier New" pitchFamily="34" charset="-122"/>
                 <a:cs typeface="Courier New" pitchFamily="34" charset="-120"/>
               </a:rPr>
-              <a:t>"_Booking": { "detail": { "route": "BookingObjectPage" } }</a:t>
+              <a:t>"_Itens": { "detail": { "route": "Pedido__ItensObjectPage" } }</a:t>
             </a:r>
             <a:endParaRPr lang="en-US" sz="900" dirty="0"/>
           </a:p>
@@ -8965,7 +8965,7 @@
                 <a:ea typeface="Courier New" pitchFamily="34" charset="-122"/>
                 <a:cs typeface="Courier New" pitchFamily="34" charset="-120"/>
               </a:rPr>
-              <a:t>_Booking</a:t>
+              <a:t>_Itens</a:t>
             </a:r>
             <a:endParaRPr lang="en-US" sz="1400" dirty="0"/>
           </a:p>
@@ -8979,7 +8979,7 @@
                   <a:srgbClr val="556B82"/>
                 </a:solidFill>
               </a:rPr>
-              <a:t>A associação de composição que leva da viagem aos bookings.</a:t>
+              <a:t>A associação de composição que leva do pedido aos itens.</a:t>
             </a:r>
             <a:endParaRPr lang="en-US" sz="1400" dirty="0"/>
           </a:p>
@@ -9328,7 +9328,7 @@
                   <a:srgbClr val="89D1FF"/>
                 </a:solidFill>
               </a:rPr>
-              <a:t>AULA 03.08 · SEÇÃO 2</a:t>
+              <a:t>AULA 05.08 · SEÇÃO 2</a:t>
             </a:r>
             <a:endParaRPr lang="en-US" sz="1300" dirty="0"/>
           </a:p>
@@ -9553,7 +9553,7 @@
                   <a:srgbClr val="D1EFFF"/>
                 </a:solidFill>
               </a:rPr>
-              <a:t>  Customer, Travel</a:t>
+              <a:t>  ZPCCliente, ZPCPedidoCompra</a:t>
             </a:r>
             <a:endParaRPr lang="en-US" sz="1400" dirty="0"/>
           </a:p>
@@ -9939,7 +9939,7 @@
                 <a:ea typeface="Courier New" pitchFamily="34" charset="-122"/>
                 <a:cs typeface="Courier New" pitchFamily="34" charset="-120"/>
               </a:rPr>
-              <a:t>Customer</a:t>
+              <a:t>ZPCCliente</a:t>
             </a:r>
             <a:r>
               <a:rPr lang="en-US" sz="1300" dirty="0">
@@ -9958,7 +9958,7 @@
                 <a:ea typeface="Courier New" pitchFamily="34" charset="-122"/>
                 <a:cs typeface="Courier New" pitchFamily="34" charset="-120"/>
               </a:rPr>
-              <a:t>Travel</a:t>
+              <a:t>ZPCPedidoCompra</a:t>
             </a:r>
             <a:r>
               <a:rPr lang="en-US" sz="1300" dirty="0">
@@ -9966,7 +9966,7 @@
                   <a:srgbClr val="556B82"/>
                 </a:solidFill>
               </a:rPr>
-              <a:t>.</a:t>
+              <a:t> no projeto.</a:t>
             </a:r>
             <a:endParaRPr lang="en-US" sz="1400" dirty="0"/>
           </a:p>
@@ -10124,7 +10124,7 @@
                 <a:ea typeface="Courier New" pitchFamily="34" charset="-122"/>
                 <a:cs typeface="Courier New" pitchFamily="34" charset="-120"/>
               </a:rPr>
-              <a:t>#Customer-display</a:t>
+              <a:t>#ZPCPedidoCompra-manage</a:t>
             </a:r>
             <a:r>
               <a:rPr lang="en-US" sz="1300" dirty="0">
@@ -10345,7 +10345,7 @@
         </p:blipFill>
         <p:spPr>
           <a:xfrm>
-            <a:off x="850392" y="2876042"/>
+            <a:off x="4624730" y="2876042"/>
             <a:ext cx="256032" cy="256032"/>
           </a:xfrm>
           <a:prstGeom prst="rect">
@@ -10369,8 +10369,8 @@
         </p:blipFill>
         <p:spPr>
           <a:xfrm>
-            <a:off x="4624730" y="2876042"/>
-            <a:ext cx="256032" cy="256032"/>
+            <a:off x="749808" y="4804918"/>
+            <a:ext cx="310896" cy="310896"/>
           </a:xfrm>
           <a:prstGeom prst="rect">
             <a:avLst/>
@@ -10393,7 +10393,7 @@
         </p:blipFill>
         <p:spPr>
           <a:xfrm>
-            <a:off x="8399069" y="2876042"/>
+            <a:off x="850392" y="2876042"/>
             <a:ext cx="256032" cy="256032"/>
           </a:xfrm>
           <a:prstGeom prst="rect">
@@ -10417,8 +10417,8 @@
         </p:blipFill>
         <p:spPr>
           <a:xfrm>
-            <a:off x="749808" y="4804918"/>
-            <a:ext cx="310896" cy="310896"/>
+            <a:off x="8399069" y="2876042"/>
+            <a:ext cx="256032" cy="256032"/>
           </a:xfrm>
           <a:prstGeom prst="rect">
             <a:avLst/>
@@ -10629,7 +10629,7 @@
         <p:spPr>
           <a:xfrm>
             <a:off x="640080" y="1700784"/>
-            <a:ext cx="2852928" cy="292608"/>
+            <a:ext cx="2542032" cy="292608"/>
           </a:xfrm>
           <a:prstGeom prst="rect">
             <a:avLst/>
@@ -10649,7 +10649,7 @@
         <p:spPr>
           <a:xfrm>
             <a:off x="640080" y="1700784"/>
-            <a:ext cx="2852928" cy="27432"/>
+            <a:ext cx="2542032" cy="27432"/>
           </a:xfrm>
           <a:prstGeom prst="rect">
             <a:avLst/>
@@ -10669,7 +10669,7 @@
         <p:spPr>
           <a:xfrm>
             <a:off x="731520" y="1719072"/>
-            <a:ext cx="2670048" cy="274320"/>
+            <a:ext cx="2359152" cy="274320"/>
           </a:xfrm>
           <a:prstGeom prst="rect">
             <a:avLst/>
@@ -10690,7 +10690,7 @@
                   <a:srgbClr val="FFFFFF"/>
                 </a:solidFill>
               </a:rPr>
-              <a:t>zc_fe_travel_######.ddlx.asddlxs</a:t>
+              <a:t>zc_pc_pedido_app.ddls.asddls</a:t>
             </a:r>
             <a:endParaRPr lang="en-US" sz="950" dirty="0"/>
           </a:p>
@@ -10726,7 +10726,7 @@
                   <a:srgbClr val="9DA5B4"/>
                 </a:solidFill>
               </a:rPr>
-              <a:t>ZFE_TRAVEL_###### › Metadata Extensions</a:t>
+              <a:t>ZAVBS_PC_PEDIDOS › ZC_PC_PEDIDO_APP (trecho real) + botão ilustrativo</a:t>
             </a:r>
             <a:endParaRPr lang="en-US" sz="850" dirty="0"/>
           </a:p>
@@ -10932,6 +10932,46 @@
             </a:r>
             <a:endParaRPr lang="en-US" sz="1050" dirty="0"/>
           </a:p>
+          <a:p>
+            <a:pPr algn="r" indent="0" marL="0">
+              <a:lnSpc>
+                <a:spcPct val="105000"/>
+              </a:lnSpc>
+              <a:buNone/>
+            </a:pPr>
+            <a:r>
+              <a:rPr lang="en-US" sz="1050" dirty="0">
+                <a:solidFill>
+                  <a:srgbClr val="6E7681"/>
+                </a:solidFill>
+                <a:latin typeface="Courier New" pitchFamily="34" charset="0"/>
+                <a:ea typeface="Courier New" pitchFamily="34" charset="-122"/>
+                <a:cs typeface="Courier New" pitchFamily="34" charset="-120"/>
+              </a:rPr>
+              <a:t>10</a:t>
+            </a:r>
+            <a:endParaRPr lang="en-US" sz="1050" dirty="0"/>
+          </a:p>
+          <a:p>
+            <a:pPr algn="r" indent="0" marL="0">
+              <a:lnSpc>
+                <a:spcPct val="105000"/>
+              </a:lnSpc>
+              <a:buNone/>
+            </a:pPr>
+            <a:r>
+              <a:rPr lang="en-US" sz="1050" dirty="0">
+                <a:solidFill>
+                  <a:srgbClr val="6E7681"/>
+                </a:solidFill>
+                <a:latin typeface="Courier New" pitchFamily="34" charset="0"/>
+                <a:ea typeface="Courier New" pitchFamily="34" charset="-122"/>
+                <a:cs typeface="Courier New" pitchFamily="34" charset="-120"/>
+              </a:rPr>
+              <a:t>11</a:t>
+            </a:r>
+            <a:endParaRPr lang="en-US" sz="1050" dirty="0"/>
+          </a:p>
         </p:txBody>
       </p:sp>
       <p:sp>
@@ -10962,81 +11002,15 @@
               <a:buNone/>
             </a:pPr>
             <a:r>
-              <a:rPr lang="en-US" sz="1050" dirty="0">
-                <a:solidFill>
-                  <a:srgbClr val="CCCCCC"/>
-                </a:solidFill>
-                <a:latin typeface="Courier New" pitchFamily="34" charset="0"/>
-                <a:ea typeface="Courier New" pitchFamily="34" charset="-122"/>
-                <a:cs typeface="Courier New" pitchFamily="34" charset="-120"/>
-              </a:rPr>
-              <a:t>@</a:t>
-            </a:r>
-            <a:r>
-              <a:rPr lang="en-US" sz="1050" dirty="0">
-                <a:solidFill>
-                  <a:srgbClr val="CCCCCC"/>
-                </a:solidFill>
-                <a:latin typeface="Courier New" pitchFamily="34" charset="0"/>
-                <a:ea typeface="Courier New" pitchFamily="34" charset="-122"/>
-                <a:cs typeface="Courier New" pitchFamily="34" charset="-120"/>
-              </a:rPr>
-              <a:t>UI</a:t>
-            </a:r>
-            <a:r>
-              <a:rPr lang="en-US" sz="1050" dirty="0">
-                <a:solidFill>
-                  <a:srgbClr val="CCCCCC"/>
-                </a:solidFill>
-                <a:latin typeface="Courier New" pitchFamily="34" charset="0"/>
-                <a:ea typeface="Courier New" pitchFamily="34" charset="-122"/>
-                <a:cs typeface="Courier New" pitchFamily="34" charset="-120"/>
-              </a:rPr>
-              <a:t>.</a:t>
-            </a:r>
-            <a:r>
-              <a:rPr lang="en-US" sz="1050" dirty="0">
-                <a:solidFill>
-                  <a:srgbClr val="CCCCCC"/>
-                </a:solidFill>
-                <a:latin typeface="Courier New" pitchFamily="34" charset="0"/>
-                <a:ea typeface="Courier New" pitchFamily="34" charset="-122"/>
-                <a:cs typeface="Courier New" pitchFamily="34" charset="-120"/>
-              </a:rPr>
-              <a:t>lineItem</a:t>
-            </a:r>
-            <a:r>
-              <a:rPr lang="en-US" sz="1050" dirty="0">
-                <a:solidFill>
-                  <a:srgbClr val="CCCCCC"/>
-                </a:solidFill>
-                <a:latin typeface="Courier New" pitchFamily="34" charset="0"/>
-                <a:ea typeface="Courier New" pitchFamily="34" charset="-122"/>
-                <a:cs typeface="Courier New" pitchFamily="34" charset="-120"/>
-              </a:rPr>
-              <a:t>:</a:t>
-            </a:r>
-            <a:r>
-              <a:rPr lang="en-US" sz="1050" dirty="0">
-                <a:solidFill>
-                  <a:srgbClr val="CCCCCC"/>
-                </a:solidFill>
-                <a:latin typeface="Courier New" pitchFamily="34" charset="0"/>
-                <a:ea typeface="Courier New" pitchFamily="34" charset="-122"/>
-                <a:cs typeface="Courier New" pitchFamily="34" charset="-120"/>
-              </a:rPr>
-              <a:t> </a:t>
-            </a:r>
-            <a:r>
-              <a:rPr lang="en-US" sz="1050" dirty="0">
-                <a:solidFill>
-                  <a:srgbClr val="CCCCCC"/>
-                </a:solidFill>
-                <a:latin typeface="Courier New" pitchFamily="34" charset="0"/>
-                <a:ea typeface="Courier New" pitchFamily="34" charset="-122"/>
-                <a:cs typeface="Courier New" pitchFamily="34" charset="-120"/>
-              </a:rPr>
-              <a:t>[</a:t>
+              <a:rPr lang="en-US" sz="1050" i="1" dirty="0">
+                <a:solidFill>
+                  <a:srgbClr val="6A9955"/>
+                </a:solidFill>
+                <a:latin typeface="Courier New" pitchFamily="34" charset="0"/>
+                <a:ea typeface="Courier New" pitchFamily="34" charset="-122"/>
+                <a:cs typeface="Courier New" pitchFamily="34" charset="-120"/>
+              </a:rPr>
+              <a:t>" Na projeção: nome e CPF viram links para o cliente</a:t>
             </a:r>
             <a:endParaRPr lang="en-US" sz="1050" dirty="0"/>
           </a:p>
@@ -11056,7 +11030,7 @@
                 <a:ea typeface="Courier New" pitchFamily="34" charset="-122"/>
                 <a:cs typeface="Courier New" pitchFamily="34" charset="-120"/>
               </a:rPr>
-              <a:t>  </a:t>
+              <a:t>@</a:t>
             </a:r>
             <a:r>
               <a:rPr lang="en-US" sz="1050" dirty="0">
@@ -11067,7 +11041,7 @@
                 <a:ea typeface="Courier New" pitchFamily="34" charset="-122"/>
                 <a:cs typeface="Courier New" pitchFamily="34" charset="-120"/>
               </a:rPr>
-              <a:t>{</a:t>
+              <a:t>Consumption</a:t>
             </a:r>
             <a:r>
               <a:rPr lang="en-US" sz="1050" dirty="0">
@@ -11078,84 +11052,51 @@
                 <a:ea typeface="Courier New" pitchFamily="34" charset="-122"/>
                 <a:cs typeface="Courier New" pitchFamily="34" charset="-120"/>
               </a:rPr>
+              <a:t>.</a:t>
+            </a:r>
+            <a:r>
+              <a:rPr lang="en-US" sz="1050" dirty="0">
+                <a:solidFill>
+                  <a:srgbClr val="CCCCCC"/>
+                </a:solidFill>
+                <a:latin typeface="Courier New" pitchFamily="34" charset="0"/>
+                <a:ea typeface="Courier New" pitchFamily="34" charset="-122"/>
+                <a:cs typeface="Courier New" pitchFamily="34" charset="-120"/>
+              </a:rPr>
+              <a:t>semanticObject</a:t>
+            </a:r>
+            <a:r>
+              <a:rPr lang="en-US" sz="1050" dirty="0">
+                <a:solidFill>
+                  <a:srgbClr val="CCCCCC"/>
+                </a:solidFill>
+                <a:latin typeface="Courier New" pitchFamily="34" charset="0"/>
+                <a:ea typeface="Courier New" pitchFamily="34" charset="-122"/>
+                <a:cs typeface="Courier New" pitchFamily="34" charset="-120"/>
+              </a:rPr>
+              <a:t>:</a:t>
+            </a:r>
+            <a:r>
+              <a:rPr lang="en-US" sz="1050" dirty="0">
+                <a:solidFill>
+                  <a:srgbClr val="CCCCCC"/>
+                </a:solidFill>
+                <a:latin typeface="Courier New" pitchFamily="34" charset="0"/>
+                <a:ea typeface="Courier New" pitchFamily="34" charset="-122"/>
+                <a:cs typeface="Courier New" pitchFamily="34" charset="-120"/>
+              </a:rPr>
               <a:t> </a:t>
             </a:r>
             <a:r>
               <a:rPr lang="en-US" sz="1050" dirty="0">
                 <a:solidFill>
-                  <a:srgbClr val="CCCCCC"/>
-                </a:solidFill>
-                <a:latin typeface="Courier New" pitchFamily="34" charset="0"/>
-                <a:ea typeface="Courier New" pitchFamily="34" charset="-122"/>
-                <a:cs typeface="Courier New" pitchFamily="34" charset="-120"/>
-              </a:rPr>
-              <a:t>position</a:t>
-            </a:r>
-            <a:r>
-              <a:rPr lang="en-US" sz="1050" dirty="0">
-                <a:solidFill>
-                  <a:srgbClr val="CCCCCC"/>
-                </a:solidFill>
-                <a:latin typeface="Courier New" pitchFamily="34" charset="0"/>
-                <a:ea typeface="Courier New" pitchFamily="34" charset="-122"/>
-                <a:cs typeface="Courier New" pitchFamily="34" charset="-120"/>
-              </a:rPr>
-              <a:t>:</a:t>
-            </a:r>
-            <a:r>
-              <a:rPr lang="en-US" sz="1050" dirty="0">
-                <a:solidFill>
-                  <a:srgbClr val="CCCCCC"/>
-                </a:solidFill>
-                <a:latin typeface="Courier New" pitchFamily="34" charset="0"/>
-                <a:ea typeface="Courier New" pitchFamily="34" charset="-122"/>
-                <a:cs typeface="Courier New" pitchFamily="34" charset="-120"/>
-              </a:rPr>
-              <a:t> </a:t>
-            </a:r>
-            <a:r>
-              <a:rPr lang="en-US" sz="1050" dirty="0">
-                <a:solidFill>
-                  <a:srgbClr val="B5CEA8"/>
-                </a:solidFill>
-                <a:latin typeface="Courier New" pitchFamily="34" charset="0"/>
-                <a:ea typeface="Courier New" pitchFamily="34" charset="-122"/>
-                <a:cs typeface="Courier New" pitchFamily="34" charset="-120"/>
-              </a:rPr>
-              <a:t>30</a:t>
-            </a:r>
-            <a:r>
-              <a:rPr lang="en-US" sz="1050" dirty="0">
-                <a:solidFill>
-                  <a:srgbClr val="CCCCCC"/>
-                </a:solidFill>
-                <a:latin typeface="Courier New" pitchFamily="34" charset="0"/>
-                <a:ea typeface="Courier New" pitchFamily="34" charset="-122"/>
-                <a:cs typeface="Courier New" pitchFamily="34" charset="-120"/>
-              </a:rPr>
-              <a:t> </a:t>
-            </a:r>
-            <a:r>
-              <a:rPr lang="en-US" sz="1050" dirty="0">
-                <a:solidFill>
-                  <a:srgbClr val="CCCCCC"/>
-                </a:solidFill>
-                <a:latin typeface="Courier New" pitchFamily="34" charset="0"/>
-                <a:ea typeface="Courier New" pitchFamily="34" charset="-122"/>
-                <a:cs typeface="Courier New" pitchFamily="34" charset="-120"/>
-              </a:rPr>
-              <a:t>}</a:t>
-            </a:r>
-            <a:r>
-              <a:rPr lang="en-US" sz="1050" dirty="0">
-                <a:solidFill>
-                  <a:srgbClr val="CCCCCC"/>
-                </a:solidFill>
-                <a:latin typeface="Courier New" pitchFamily="34" charset="0"/>
-                <a:ea typeface="Courier New" pitchFamily="34" charset="-122"/>
-                <a:cs typeface="Courier New" pitchFamily="34" charset="-120"/>
-              </a:rPr>
-              <a:t>,</a:t>
+                  <a:srgbClr val="CE9178"/>
+                </a:solidFill>
+                <a:latin typeface="Courier New" pitchFamily="34" charset="0"/>
+                <a:ea typeface="Courier New" pitchFamily="34" charset="-122"/>
+                <a:cs typeface="Courier New" pitchFamily="34" charset="-120"/>
+              </a:rPr>
+              <a:t>'ZPCCliente'</a:t>
             </a:r>
             <a:endParaRPr lang="en-US" sz="1050" dirty="0"/>
           </a:p>
@@ -11175,7 +11116,7 @@
                 <a:ea typeface="Courier New" pitchFamily="34" charset="-122"/>
                 <a:cs typeface="Courier New" pitchFamily="34" charset="-120"/>
               </a:rPr>
-              <a:t>  </a:t>
+              <a:t>@</a:t>
             </a:r>
             <a:r>
               <a:rPr lang="en-US" sz="1050" dirty="0">
@@ -11186,7 +11127,7 @@
                 <a:ea typeface="Courier New" pitchFamily="34" charset="-122"/>
                 <a:cs typeface="Courier New" pitchFamily="34" charset="-120"/>
               </a:rPr>
-              <a:t>{</a:t>
+              <a:t>Consumption</a:t>
             </a:r>
             <a:r>
               <a:rPr lang="en-US" sz="1050" dirty="0">
@@ -11197,7 +11138,7 @@
                 <a:ea typeface="Courier New" pitchFamily="34" charset="-122"/>
                 <a:cs typeface="Courier New" pitchFamily="34" charset="-120"/>
               </a:rPr>
-              <a:t> </a:t>
+              <a:t>.</a:t>
             </a:r>
             <a:r>
               <a:rPr lang="en-US" sz="1050" dirty="0">
@@ -11208,7 +11149,7 @@
                 <a:ea typeface="Courier New" pitchFamily="34" charset="-122"/>
                 <a:cs typeface="Courier New" pitchFamily="34" charset="-120"/>
               </a:rPr>
-              <a:t>type</a:t>
+              <a:t>semanticObjectMapping</a:t>
             </a:r>
             <a:r>
               <a:rPr lang="en-US" sz="1050" dirty="0">
@@ -11219,51 +11160,29 @@
                 <a:ea typeface="Courier New" pitchFamily="34" charset="-122"/>
                 <a:cs typeface="Courier New" pitchFamily="34" charset="-120"/>
               </a:rPr>
+              <a:t>.</a:t>
+            </a:r>
+            <a:r>
+              <a:rPr lang="en-US" sz="1050" dirty="0">
+                <a:solidFill>
+                  <a:srgbClr val="CCCCCC"/>
+                </a:solidFill>
+                <a:latin typeface="Courier New" pitchFamily="34" charset="0"/>
+                <a:ea typeface="Courier New" pitchFamily="34" charset="-122"/>
+                <a:cs typeface="Courier New" pitchFamily="34" charset="-120"/>
+              </a:rPr>
+              <a:t>additionalBinding</a:t>
+            </a:r>
+            <a:r>
+              <a:rPr lang="en-US" sz="1050" dirty="0">
+                <a:solidFill>
+                  <a:srgbClr val="CCCCCC"/>
+                </a:solidFill>
+                <a:latin typeface="Courier New" pitchFamily="34" charset="0"/>
+                <a:ea typeface="Courier New" pitchFamily="34" charset="-122"/>
+                <a:cs typeface="Courier New" pitchFamily="34" charset="-120"/>
+              </a:rPr>
               <a:t>:</a:t>
-            </a:r>
-            <a:r>
-              <a:rPr lang="en-US" sz="1050" dirty="0">
-                <a:solidFill>
-                  <a:srgbClr val="CCCCCC"/>
-                </a:solidFill>
-                <a:latin typeface="Courier New" pitchFamily="34" charset="0"/>
-                <a:ea typeface="Courier New" pitchFamily="34" charset="-122"/>
-                <a:cs typeface="Courier New" pitchFamily="34" charset="-120"/>
-              </a:rPr>
-              <a:t> </a:t>
-            </a:r>
-            <a:r>
-              <a:rPr lang="en-US" sz="1050" dirty="0">
-                <a:solidFill>
-                  <a:srgbClr val="CCCCCC"/>
-                </a:solidFill>
-                <a:latin typeface="Courier New" pitchFamily="34" charset="0"/>
-                <a:ea typeface="Courier New" pitchFamily="34" charset="-122"/>
-                <a:cs typeface="Courier New" pitchFamily="34" charset="-120"/>
-              </a:rPr>
-              <a:t>#</a:t>
-            </a:r>
-            <a:r>
-              <a:rPr lang="en-US" sz="1050" dirty="0">
-                <a:solidFill>
-                  <a:srgbClr val="CCCCCC"/>
-                </a:solidFill>
-                <a:latin typeface="Courier New" pitchFamily="34" charset="0"/>
-                <a:ea typeface="Courier New" pitchFamily="34" charset="-122"/>
-                <a:cs typeface="Courier New" pitchFamily="34" charset="-120"/>
-              </a:rPr>
-              <a:t>FOR_INTENT_BASED_NAVIGATION</a:t>
-            </a:r>
-            <a:r>
-              <a:rPr lang="en-US" sz="1050" dirty="0">
-                <a:solidFill>
-                  <a:srgbClr val="CCCCCC"/>
-                </a:solidFill>
-                <a:latin typeface="Courier New" pitchFamily="34" charset="0"/>
-                <a:ea typeface="Courier New" pitchFamily="34" charset="-122"/>
-                <a:cs typeface="Courier New" pitchFamily="34" charset="-120"/>
-              </a:rPr>
-              <a:t>,</a:t>
             </a:r>
             <a:endParaRPr lang="en-US" sz="1050" dirty="0"/>
           </a:p>
@@ -11283,7 +11202,7 @@
                 <a:ea typeface="Courier New" pitchFamily="34" charset="-122"/>
                 <a:cs typeface="Courier New" pitchFamily="34" charset="-120"/>
               </a:rPr>
-              <a:t>    </a:t>
+              <a:t>  </a:t>
             </a:r>
             <a:r>
               <a:rPr lang="en-US" sz="1050" dirty="0">
@@ -11294,7 +11213,7 @@
                 <a:ea typeface="Courier New" pitchFamily="34" charset="-122"/>
                 <a:cs typeface="Courier New" pitchFamily="34" charset="-120"/>
               </a:rPr>
-              <a:t>semanticObject</a:t>
+              <a:t>[</a:t>
             </a:r>
             <a:r>
               <a:rPr lang="en-US" sz="1050" dirty="0">
@@ -11305,6 +11224,39 @@
                 <a:ea typeface="Courier New" pitchFamily="34" charset="-122"/>
                 <a:cs typeface="Courier New" pitchFamily="34" charset="-120"/>
               </a:rPr>
+              <a:t>{</a:t>
+            </a:r>
+            <a:r>
+              <a:rPr lang="en-US" sz="1050" dirty="0">
+                <a:solidFill>
+                  <a:srgbClr val="CCCCCC"/>
+                </a:solidFill>
+                <a:latin typeface="Courier New" pitchFamily="34" charset="0"/>
+                <a:ea typeface="Courier New" pitchFamily="34" charset="-122"/>
+                <a:cs typeface="Courier New" pitchFamily="34" charset="-120"/>
+              </a:rPr>
+              <a:t> </a:t>
+            </a:r>
+            <a:r>
+              <a:rPr lang="en-US" sz="1050" dirty="0">
+                <a:solidFill>
+                  <a:srgbClr val="CCCCCC"/>
+                </a:solidFill>
+                <a:latin typeface="Courier New" pitchFamily="34" charset="0"/>
+                <a:ea typeface="Courier New" pitchFamily="34" charset="-122"/>
+                <a:cs typeface="Courier New" pitchFamily="34" charset="-120"/>
+              </a:rPr>
+              <a:t>localElement</a:t>
+            </a:r>
+            <a:r>
+              <a:rPr lang="en-US" sz="1050" dirty="0">
+                <a:solidFill>
+                  <a:srgbClr val="CCCCCC"/>
+                </a:solidFill>
+                <a:latin typeface="Courier New" pitchFamily="34" charset="0"/>
+                <a:ea typeface="Courier New" pitchFamily="34" charset="-122"/>
+                <a:cs typeface="Courier New" pitchFamily="34" charset="-120"/>
+              </a:rPr>
               <a:t>:</a:t>
             </a:r>
             <a:r>
@@ -11327,7 +11279,7 @@
                 <a:ea typeface="Courier New" pitchFamily="34" charset="-122"/>
                 <a:cs typeface="Courier New" pitchFamily="34" charset="-120"/>
               </a:rPr>
-              <a:t>'Customer'</a:t>
+              <a:t>'CpfCliente'</a:t>
             </a:r>
             <a:r>
               <a:rPr lang="en-US" sz="1050" dirty="0">
@@ -11339,6 +11291,94 @@
                 <a:cs typeface="Courier New" pitchFamily="34" charset="-120"/>
               </a:rPr>
               <a:t>,</a:t>
+            </a:r>
+            <a:r>
+              <a:rPr lang="en-US" sz="1050" dirty="0">
+                <a:solidFill>
+                  <a:srgbClr val="CCCCCC"/>
+                </a:solidFill>
+                <a:latin typeface="Courier New" pitchFamily="34" charset="0"/>
+                <a:ea typeface="Courier New" pitchFamily="34" charset="-122"/>
+                <a:cs typeface="Courier New" pitchFamily="34" charset="-120"/>
+              </a:rPr>
+              <a:t> </a:t>
+            </a:r>
+            <a:r>
+              <a:rPr lang="en-US" sz="1050" dirty="0">
+                <a:solidFill>
+                  <a:srgbClr val="CCCCCC"/>
+                </a:solidFill>
+                <a:latin typeface="Courier New" pitchFamily="34" charset="0"/>
+                <a:ea typeface="Courier New" pitchFamily="34" charset="-122"/>
+                <a:cs typeface="Courier New" pitchFamily="34" charset="-120"/>
+              </a:rPr>
+              <a:t>element</a:t>
+            </a:r>
+            <a:r>
+              <a:rPr lang="en-US" sz="1050" dirty="0">
+                <a:solidFill>
+                  <a:srgbClr val="CCCCCC"/>
+                </a:solidFill>
+                <a:latin typeface="Courier New" pitchFamily="34" charset="0"/>
+                <a:ea typeface="Courier New" pitchFamily="34" charset="-122"/>
+                <a:cs typeface="Courier New" pitchFamily="34" charset="-120"/>
+              </a:rPr>
+              <a:t>:</a:t>
+            </a:r>
+            <a:r>
+              <a:rPr lang="en-US" sz="1050" dirty="0">
+                <a:solidFill>
+                  <a:srgbClr val="CCCCCC"/>
+                </a:solidFill>
+                <a:latin typeface="Courier New" pitchFamily="34" charset="0"/>
+                <a:ea typeface="Courier New" pitchFamily="34" charset="-122"/>
+                <a:cs typeface="Courier New" pitchFamily="34" charset="-120"/>
+              </a:rPr>
+              <a:t> </a:t>
+            </a:r>
+            <a:r>
+              <a:rPr lang="en-US" sz="1050" dirty="0">
+                <a:solidFill>
+                  <a:srgbClr val="CE9178"/>
+                </a:solidFill>
+                <a:latin typeface="Courier New" pitchFamily="34" charset="0"/>
+                <a:ea typeface="Courier New" pitchFamily="34" charset="-122"/>
+                <a:cs typeface="Courier New" pitchFamily="34" charset="-120"/>
+              </a:rPr>
+              <a:t>'Cpf'</a:t>
+            </a:r>
+            <a:r>
+              <a:rPr lang="en-US" sz="1050" dirty="0">
+                <a:solidFill>
+                  <a:srgbClr val="CCCCCC"/>
+                </a:solidFill>
+                <a:latin typeface="Courier New" pitchFamily="34" charset="0"/>
+                <a:ea typeface="Courier New" pitchFamily="34" charset="-122"/>
+                <a:cs typeface="Courier New" pitchFamily="34" charset="-120"/>
+              </a:rPr>
+              <a:t> </a:t>
+            </a:r>
+            <a:r>
+              <a:rPr lang="en-US" sz="1050" dirty="0">
+                <a:solidFill>
+                  <a:srgbClr val="CCCCCC"/>
+                </a:solidFill>
+                <a:latin typeface="Courier New" pitchFamily="34" charset="0"/>
+                <a:ea typeface="Courier New" pitchFamily="34" charset="-122"/>
+                <a:cs typeface="Courier New" pitchFamily="34" charset="-120"/>
+              </a:rPr>
+              <a:t>}</a:t>
+            </a:r>
+            <a:r>
+              <a:rPr lang="en-US" sz="1050" dirty="0">
+                <a:solidFill>
+                  <a:srgbClr val="CCCCCC"/>
+                </a:solidFill>
+                <a:latin typeface="Courier New" pitchFamily="34" charset="0"/>
+                <a:ea typeface="Courier New" pitchFamily="34" charset="-122"/>
+                <a:cs typeface="Courier New" pitchFamily="34" charset="-120"/>
+              </a:rPr>
+              <a:t>]</a:t>
             </a:r>
             <a:endParaRPr lang="en-US" sz="1050" dirty="0"/>
           </a:p>
@@ -11358,7 +11398,7 @@
                 <a:ea typeface="Courier New" pitchFamily="34" charset="-122"/>
                 <a:cs typeface="Courier New" pitchFamily="34" charset="-120"/>
               </a:rPr>
-              <a:t>    </a:t>
+              <a:t>_Cliente</a:t>
             </a:r>
             <a:r>
               <a:rPr lang="en-US" sz="1050" dirty="0">
@@ -11369,7 +11409,7 @@
                 <a:ea typeface="Courier New" pitchFamily="34" charset="-122"/>
                 <a:cs typeface="Courier New" pitchFamily="34" charset="-120"/>
               </a:rPr>
-              <a:t>semanticObjectAction</a:t>
+              <a:t>.</a:t>
             </a:r>
             <a:r>
               <a:rPr lang="en-US" sz="1050" dirty="0">
@@ -11380,7 +11420,7 @@
                 <a:ea typeface="Courier New" pitchFamily="34" charset="-122"/>
                 <a:cs typeface="Courier New" pitchFamily="34" charset="-120"/>
               </a:rPr>
-              <a:t>:</a:t>
+              <a:t>Nome</a:t>
             </a:r>
             <a:r>
               <a:rPr lang="en-US" sz="1050" dirty="0">
@@ -11396,13 +11436,35 @@
             <a:r>
               <a:rPr lang="en-US" sz="1050" dirty="0">
                 <a:solidFill>
-                  <a:srgbClr val="CE9178"/>
-                </a:solidFill>
-                <a:latin typeface="Courier New" pitchFamily="34" charset="0"/>
-                <a:ea typeface="Courier New" pitchFamily="34" charset="-122"/>
-                <a:cs typeface="Courier New" pitchFamily="34" charset="-120"/>
-              </a:rPr>
-              <a:t>'display'</a:t>
+                  <a:srgbClr val="CCCCCC"/>
+                </a:solidFill>
+                <a:latin typeface="Courier New" pitchFamily="34" charset="0"/>
+                <a:ea typeface="Courier New" pitchFamily="34" charset="-122"/>
+                <a:cs typeface="Courier New" pitchFamily="34" charset="-120"/>
+              </a:rPr>
+              <a:t>as</a:t>
+            </a:r>
+            <a:r>
+              <a:rPr lang="en-US" sz="1050" dirty="0">
+                <a:solidFill>
+                  <a:srgbClr val="CCCCCC"/>
+                </a:solidFill>
+                <a:latin typeface="Courier New" pitchFamily="34" charset="0"/>
+                <a:ea typeface="Courier New" pitchFamily="34" charset="-122"/>
+                <a:cs typeface="Courier New" pitchFamily="34" charset="-120"/>
+              </a:rPr>
+              <a:t> </a:t>
+            </a:r>
+            <a:r>
+              <a:rPr lang="en-US" sz="1050" dirty="0">
+                <a:solidFill>
+                  <a:srgbClr val="CCCCCC"/>
+                </a:solidFill>
+                <a:latin typeface="Courier New" pitchFamily="34" charset="0"/>
+                <a:ea typeface="Courier New" pitchFamily="34" charset="-122"/>
+                <a:cs typeface="Courier New" pitchFamily="34" charset="-120"/>
+              </a:rPr>
+              <a:t>NomeCliente</a:t>
             </a:r>
             <a:r>
               <a:rPr lang="en-US" sz="1050" dirty="0">
@@ -11427,79 +11489,13 @@
             <a:r>
               <a:rPr lang="en-US" sz="1050" dirty="0">
                 <a:solidFill>
-                  <a:srgbClr val="CCCCCC"/>
-                </a:solidFill>
-                <a:latin typeface="Courier New" pitchFamily="34" charset="0"/>
-                <a:ea typeface="Courier New" pitchFamily="34" charset="-122"/>
-                <a:cs typeface="Courier New" pitchFamily="34" charset="-120"/>
-              </a:rPr>
-              <a:t>    </a:t>
-            </a:r>
-            <a:r>
-              <a:rPr lang="en-US" sz="1050" dirty="0">
-                <a:solidFill>
-                  <a:srgbClr val="CCCCCC"/>
-                </a:solidFill>
-                <a:latin typeface="Courier New" pitchFamily="34" charset="0"/>
-                <a:ea typeface="Courier New" pitchFamily="34" charset="-122"/>
-                <a:cs typeface="Courier New" pitchFamily="34" charset="-120"/>
-              </a:rPr>
-              <a:t>label</a:t>
-            </a:r>
-            <a:r>
-              <a:rPr lang="en-US" sz="1050" dirty="0">
-                <a:solidFill>
-                  <a:srgbClr val="CCCCCC"/>
-                </a:solidFill>
-                <a:latin typeface="Courier New" pitchFamily="34" charset="0"/>
-                <a:ea typeface="Courier New" pitchFamily="34" charset="-122"/>
-                <a:cs typeface="Courier New" pitchFamily="34" charset="-120"/>
-              </a:rPr>
-              <a:t>:</a:t>
-            </a:r>
-            <a:r>
-              <a:rPr lang="en-US" sz="1050" dirty="0">
-                <a:solidFill>
-                  <a:srgbClr val="CCCCCC"/>
+                  <a:srgbClr val="000000"/>
                 </a:solidFill>
                 <a:latin typeface="Courier New" pitchFamily="34" charset="0"/>
                 <a:ea typeface="Courier New" pitchFamily="34" charset="-122"/>
                 <a:cs typeface="Courier New" pitchFamily="34" charset="-120"/>
               </a:rPr>
               <a:t> </a:t>
-            </a:r>
-            <a:r>
-              <a:rPr lang="en-US" sz="1050" dirty="0">
-                <a:solidFill>
-                  <a:srgbClr val="CE9178"/>
-                </a:solidFill>
-                <a:latin typeface="Courier New" pitchFamily="34" charset="0"/>
-                <a:ea typeface="Courier New" pitchFamily="34" charset="-122"/>
-                <a:cs typeface="Courier New" pitchFamily="34" charset="-120"/>
-              </a:rPr>
-              <a:t>'Show Customer'</a:t>
-            </a:r>
-            <a:r>
-              <a:rPr lang="en-US" sz="1050" dirty="0">
-                <a:solidFill>
-                  <a:srgbClr val="CCCCCC"/>
-                </a:solidFill>
-                <a:latin typeface="Courier New" pitchFamily="34" charset="0"/>
-                <a:ea typeface="Courier New" pitchFamily="34" charset="-122"/>
-                <a:cs typeface="Courier New" pitchFamily="34" charset="-120"/>
-              </a:rPr>
-              <a:t> </a:t>
-            </a:r>
-            <a:r>
-              <a:rPr lang="en-US" sz="1050" dirty="0">
-                <a:solidFill>
-                  <a:srgbClr val="CCCCCC"/>
-                </a:solidFill>
-                <a:latin typeface="Courier New" pitchFamily="34" charset="0"/>
-                <a:ea typeface="Courier New" pitchFamily="34" charset="-122"/>
-                <a:cs typeface="Courier New" pitchFamily="34" charset="-120"/>
-              </a:rPr>
-              <a:t>}</a:t>
             </a:r>
             <a:endParaRPr lang="en-US" sz="1050" dirty="0"/>
           </a:p>
@@ -11511,15 +11507,15 @@
               <a:buNone/>
             </a:pPr>
             <a:r>
-              <a:rPr lang="en-US" sz="1050" dirty="0">
-                <a:solidFill>
-                  <a:srgbClr val="CCCCCC"/>
-                </a:solidFill>
-                <a:latin typeface="Courier New" pitchFamily="34" charset="0"/>
-                <a:ea typeface="Courier New" pitchFamily="34" charset="-122"/>
-                <a:cs typeface="Courier New" pitchFamily="34" charset="-120"/>
-              </a:rPr>
-              <a:t>]</a:t>
+              <a:rPr lang="en-US" sz="1050" i="1" dirty="0">
+                <a:solidFill>
+                  <a:srgbClr val="6A9955"/>
+                </a:solidFill>
+                <a:latin typeface="Courier New" pitchFamily="34" charset="0"/>
+                <a:ea typeface="Courier New" pitchFamily="34" charset="-122"/>
+                <a:cs typeface="Courier New" pitchFamily="34" charset="-120"/>
+              </a:rPr>
+              <a:t>" Na metadata extension: um botão na toolbar</a:t>
             </a:r>
             <a:endParaRPr lang="en-US" sz="1050" dirty="0"/>
           </a:p>
@@ -11550,7 +11546,7 @@
                 <a:ea typeface="Courier New" pitchFamily="34" charset="-122"/>
                 <a:cs typeface="Courier New" pitchFamily="34" charset="-120"/>
               </a:rPr>
-              <a:t>Consumption</a:t>
+              <a:t>UI</a:t>
             </a:r>
             <a:r>
               <a:rPr lang="en-US" sz="1050" dirty="0">
@@ -11572,7 +11568,7 @@
                 <a:ea typeface="Courier New" pitchFamily="34" charset="-122"/>
                 <a:cs typeface="Courier New" pitchFamily="34" charset="-120"/>
               </a:rPr>
-              <a:t>semanticObject</a:t>
+              <a:t>lineItem</a:t>
             </a:r>
             <a:r>
               <a:rPr lang="en-US" sz="1050" dirty="0">
@@ -11599,13 +11595,101 @@
             <a:r>
               <a:rPr lang="en-US" sz="1050" dirty="0">
                 <a:solidFill>
-                  <a:srgbClr val="CE9178"/>
-                </a:solidFill>
-                <a:latin typeface="Courier New" pitchFamily="34" charset="0"/>
-                <a:ea typeface="Courier New" pitchFamily="34" charset="-122"/>
-                <a:cs typeface="Courier New" pitchFamily="34" charset="-120"/>
-              </a:rPr>
-              <a:t>'Customer'</a:t>
+                  <a:srgbClr val="CCCCCC"/>
+                </a:solidFill>
+                <a:latin typeface="Courier New" pitchFamily="34" charset="0"/>
+                <a:ea typeface="Courier New" pitchFamily="34" charset="-122"/>
+                <a:cs typeface="Courier New" pitchFamily="34" charset="-120"/>
+              </a:rPr>
+              <a:t>[</a:t>
+            </a:r>
+            <a:r>
+              <a:rPr lang="en-US" sz="1050" dirty="0">
+                <a:solidFill>
+                  <a:srgbClr val="CCCCCC"/>
+                </a:solidFill>
+                <a:latin typeface="Courier New" pitchFamily="34" charset="0"/>
+                <a:ea typeface="Courier New" pitchFamily="34" charset="-122"/>
+                <a:cs typeface="Courier New" pitchFamily="34" charset="-120"/>
+              </a:rPr>
+              <a:t>{</a:t>
+            </a:r>
+            <a:r>
+              <a:rPr lang="en-US" sz="1050" dirty="0">
+                <a:solidFill>
+                  <a:srgbClr val="CCCCCC"/>
+                </a:solidFill>
+                <a:latin typeface="Courier New" pitchFamily="34" charset="0"/>
+                <a:ea typeface="Courier New" pitchFamily="34" charset="-122"/>
+                <a:cs typeface="Courier New" pitchFamily="34" charset="-120"/>
+              </a:rPr>
+              <a:t> </a:t>
+            </a:r>
+            <a:r>
+              <a:rPr lang="en-US" sz="1050" dirty="0">
+                <a:solidFill>
+                  <a:srgbClr val="CCCCCC"/>
+                </a:solidFill>
+                <a:latin typeface="Courier New" pitchFamily="34" charset="0"/>
+                <a:ea typeface="Courier New" pitchFamily="34" charset="-122"/>
+                <a:cs typeface="Courier New" pitchFamily="34" charset="-120"/>
+              </a:rPr>
+              <a:t>type</a:t>
+            </a:r>
+            <a:r>
+              <a:rPr lang="en-US" sz="1050" dirty="0">
+                <a:solidFill>
+                  <a:srgbClr val="CCCCCC"/>
+                </a:solidFill>
+                <a:latin typeface="Courier New" pitchFamily="34" charset="0"/>
+                <a:ea typeface="Courier New" pitchFamily="34" charset="-122"/>
+                <a:cs typeface="Courier New" pitchFamily="34" charset="-120"/>
+              </a:rPr>
+              <a:t>:</a:t>
+            </a:r>
+            <a:r>
+              <a:rPr lang="en-US" sz="1050" dirty="0">
+                <a:solidFill>
+                  <a:srgbClr val="CCCCCC"/>
+                </a:solidFill>
+                <a:latin typeface="Courier New" pitchFamily="34" charset="0"/>
+                <a:ea typeface="Courier New" pitchFamily="34" charset="-122"/>
+                <a:cs typeface="Courier New" pitchFamily="34" charset="-120"/>
+              </a:rPr>
+              <a:t> </a:t>
+            </a:r>
+            <a:r>
+              <a:rPr lang="en-US" sz="1050" dirty="0">
+                <a:solidFill>
+                  <a:srgbClr val="CCCCCC"/>
+                </a:solidFill>
+                <a:latin typeface="Courier New" pitchFamily="34" charset="0"/>
+                <a:ea typeface="Courier New" pitchFamily="34" charset="-122"/>
+                <a:cs typeface="Courier New" pitchFamily="34" charset="-120"/>
+              </a:rPr>
+              <a:t>#</a:t>
+            </a:r>
+            <a:r>
+              <a:rPr lang="en-US" sz="1050" dirty="0">
+                <a:solidFill>
+                  <a:srgbClr val="CCCCCC"/>
+                </a:solidFill>
+                <a:latin typeface="Courier New" pitchFamily="34" charset="0"/>
+                <a:ea typeface="Courier New" pitchFamily="34" charset="-122"/>
+                <a:cs typeface="Courier New" pitchFamily="34" charset="-120"/>
+              </a:rPr>
+              <a:t>FOR_INTENT_BASED_NAVIGATION</a:t>
+            </a:r>
+            <a:r>
+              <a:rPr lang="en-US" sz="1050" dirty="0">
+                <a:solidFill>
+                  <a:srgbClr val="CCCCCC"/>
+                </a:solidFill>
+                <a:latin typeface="Courier New" pitchFamily="34" charset="0"/>
+                <a:ea typeface="Courier New" pitchFamily="34" charset="-122"/>
+                <a:cs typeface="Courier New" pitchFamily="34" charset="-120"/>
+              </a:rPr>
+              <a:t>,</a:t>
             </a:r>
             <a:endParaRPr lang="en-US" sz="1050" dirty="0"/>
           </a:p>
@@ -11625,7 +11709,7 @@
                 <a:ea typeface="Courier New" pitchFamily="34" charset="-122"/>
                 <a:cs typeface="Courier New" pitchFamily="34" charset="-120"/>
               </a:rPr>
-              <a:t>CustomerID</a:t>
+              <a:t>                 </a:t>
             </a:r>
             <a:r>
               <a:rPr lang="en-US" sz="1050" dirty="0">
@@ -11636,7 +11720,223 @@
                 <a:ea typeface="Courier New" pitchFamily="34" charset="-122"/>
                 <a:cs typeface="Courier New" pitchFamily="34" charset="-120"/>
               </a:rPr>
-              <a:t>;</a:t>
+              <a:t>semanticObject</a:t>
+            </a:r>
+            <a:r>
+              <a:rPr lang="en-US" sz="1050" dirty="0">
+                <a:solidFill>
+                  <a:srgbClr val="CCCCCC"/>
+                </a:solidFill>
+                <a:latin typeface="Courier New" pitchFamily="34" charset="0"/>
+                <a:ea typeface="Courier New" pitchFamily="34" charset="-122"/>
+                <a:cs typeface="Courier New" pitchFamily="34" charset="-120"/>
+              </a:rPr>
+              <a:t>:</a:t>
+            </a:r>
+            <a:r>
+              <a:rPr lang="en-US" sz="1050" dirty="0">
+                <a:solidFill>
+                  <a:srgbClr val="CCCCCC"/>
+                </a:solidFill>
+                <a:latin typeface="Courier New" pitchFamily="34" charset="0"/>
+                <a:ea typeface="Courier New" pitchFamily="34" charset="-122"/>
+                <a:cs typeface="Courier New" pitchFamily="34" charset="-120"/>
+              </a:rPr>
+              <a:t> </a:t>
+            </a:r>
+            <a:r>
+              <a:rPr lang="en-US" sz="1050" dirty="0">
+                <a:solidFill>
+                  <a:srgbClr val="CE9178"/>
+                </a:solidFill>
+                <a:latin typeface="Courier New" pitchFamily="34" charset="0"/>
+                <a:ea typeface="Courier New" pitchFamily="34" charset="-122"/>
+                <a:cs typeface="Courier New" pitchFamily="34" charset="-120"/>
+              </a:rPr>
+              <a:t>'ZPCCliente'</a:t>
+            </a:r>
+            <a:r>
+              <a:rPr lang="en-US" sz="1050" dirty="0">
+                <a:solidFill>
+                  <a:srgbClr val="CCCCCC"/>
+                </a:solidFill>
+                <a:latin typeface="Courier New" pitchFamily="34" charset="0"/>
+                <a:ea typeface="Courier New" pitchFamily="34" charset="-122"/>
+                <a:cs typeface="Courier New" pitchFamily="34" charset="-120"/>
+              </a:rPr>
+              <a:t>,</a:t>
+            </a:r>
+            <a:endParaRPr lang="en-US" sz="1050" dirty="0"/>
+          </a:p>
+          <a:p>
+            <a:pPr indent="0" marL="0">
+              <a:lnSpc>
+                <a:spcPct val="105000"/>
+              </a:lnSpc>
+              <a:buNone/>
+            </a:pPr>
+            <a:r>
+              <a:rPr lang="en-US" sz="1050" dirty="0">
+                <a:solidFill>
+                  <a:srgbClr val="CCCCCC"/>
+                </a:solidFill>
+                <a:latin typeface="Courier New" pitchFamily="34" charset="0"/>
+                <a:ea typeface="Courier New" pitchFamily="34" charset="-122"/>
+                <a:cs typeface="Courier New" pitchFamily="34" charset="-120"/>
+              </a:rPr>
+              <a:t>                 </a:t>
+            </a:r>
+            <a:r>
+              <a:rPr lang="en-US" sz="1050" dirty="0">
+                <a:solidFill>
+                  <a:srgbClr val="CCCCCC"/>
+                </a:solidFill>
+                <a:latin typeface="Courier New" pitchFamily="34" charset="0"/>
+                <a:ea typeface="Courier New" pitchFamily="34" charset="-122"/>
+                <a:cs typeface="Courier New" pitchFamily="34" charset="-120"/>
+              </a:rPr>
+              <a:t>semanticObjectAction</a:t>
+            </a:r>
+            <a:r>
+              <a:rPr lang="en-US" sz="1050" dirty="0">
+                <a:solidFill>
+                  <a:srgbClr val="CCCCCC"/>
+                </a:solidFill>
+                <a:latin typeface="Courier New" pitchFamily="34" charset="0"/>
+                <a:ea typeface="Courier New" pitchFamily="34" charset="-122"/>
+                <a:cs typeface="Courier New" pitchFamily="34" charset="-120"/>
+              </a:rPr>
+              <a:t>:</a:t>
+            </a:r>
+            <a:r>
+              <a:rPr lang="en-US" sz="1050" dirty="0">
+                <a:solidFill>
+                  <a:srgbClr val="CCCCCC"/>
+                </a:solidFill>
+                <a:latin typeface="Courier New" pitchFamily="34" charset="0"/>
+                <a:ea typeface="Courier New" pitchFamily="34" charset="-122"/>
+                <a:cs typeface="Courier New" pitchFamily="34" charset="-120"/>
+              </a:rPr>
+              <a:t> </a:t>
+            </a:r>
+            <a:r>
+              <a:rPr lang="en-US" sz="1050" dirty="0">
+                <a:solidFill>
+                  <a:srgbClr val="CE9178"/>
+                </a:solidFill>
+                <a:latin typeface="Courier New" pitchFamily="34" charset="0"/>
+                <a:ea typeface="Courier New" pitchFamily="34" charset="-122"/>
+                <a:cs typeface="Courier New" pitchFamily="34" charset="-120"/>
+              </a:rPr>
+              <a:t>'manage'</a:t>
+            </a:r>
+            <a:r>
+              <a:rPr lang="en-US" sz="1050" dirty="0">
+                <a:solidFill>
+                  <a:srgbClr val="CCCCCC"/>
+                </a:solidFill>
+                <a:latin typeface="Courier New" pitchFamily="34" charset="0"/>
+                <a:ea typeface="Courier New" pitchFamily="34" charset="-122"/>
+                <a:cs typeface="Courier New" pitchFamily="34" charset="-120"/>
+              </a:rPr>
+              <a:t>,</a:t>
+            </a:r>
+            <a:endParaRPr lang="en-US" sz="1050" dirty="0"/>
+          </a:p>
+          <a:p>
+            <a:pPr indent="0" marL="0">
+              <a:lnSpc>
+                <a:spcPct val="105000"/>
+              </a:lnSpc>
+              <a:buNone/>
+            </a:pPr>
+            <a:r>
+              <a:rPr lang="en-US" sz="1050" dirty="0">
+                <a:solidFill>
+                  <a:srgbClr val="CCCCCC"/>
+                </a:solidFill>
+                <a:latin typeface="Courier New" pitchFamily="34" charset="0"/>
+                <a:ea typeface="Courier New" pitchFamily="34" charset="-122"/>
+                <a:cs typeface="Courier New" pitchFamily="34" charset="-120"/>
+              </a:rPr>
+              <a:t>                 </a:t>
+            </a:r>
+            <a:r>
+              <a:rPr lang="en-US" sz="1050" dirty="0">
+                <a:solidFill>
+                  <a:srgbClr val="CCCCCC"/>
+                </a:solidFill>
+                <a:latin typeface="Courier New" pitchFamily="34" charset="0"/>
+                <a:ea typeface="Courier New" pitchFamily="34" charset="-122"/>
+                <a:cs typeface="Courier New" pitchFamily="34" charset="-120"/>
+              </a:rPr>
+              <a:t>label</a:t>
+            </a:r>
+            <a:r>
+              <a:rPr lang="en-US" sz="1050" dirty="0">
+                <a:solidFill>
+                  <a:srgbClr val="CCCCCC"/>
+                </a:solidFill>
+                <a:latin typeface="Courier New" pitchFamily="34" charset="0"/>
+                <a:ea typeface="Courier New" pitchFamily="34" charset="-122"/>
+                <a:cs typeface="Courier New" pitchFamily="34" charset="-120"/>
+              </a:rPr>
+              <a:t>:</a:t>
+            </a:r>
+            <a:r>
+              <a:rPr lang="en-US" sz="1050" dirty="0">
+                <a:solidFill>
+                  <a:srgbClr val="CCCCCC"/>
+                </a:solidFill>
+                <a:latin typeface="Courier New" pitchFamily="34" charset="0"/>
+                <a:ea typeface="Courier New" pitchFamily="34" charset="-122"/>
+                <a:cs typeface="Courier New" pitchFamily="34" charset="-120"/>
+              </a:rPr>
+              <a:t> </a:t>
+            </a:r>
+            <a:r>
+              <a:rPr lang="en-US" sz="1050" dirty="0">
+                <a:solidFill>
+                  <a:srgbClr val="CE9178"/>
+                </a:solidFill>
+                <a:latin typeface="Courier New" pitchFamily="34" charset="0"/>
+                <a:ea typeface="Courier New" pitchFamily="34" charset="-122"/>
+                <a:cs typeface="Courier New" pitchFamily="34" charset="-120"/>
+              </a:rPr>
+              <a:t>'Abrir cliente'</a:t>
+            </a:r>
+            <a:r>
+              <a:rPr lang="en-US" sz="1050" dirty="0">
+                <a:solidFill>
+                  <a:srgbClr val="CCCCCC"/>
+                </a:solidFill>
+                <a:latin typeface="Courier New" pitchFamily="34" charset="0"/>
+                <a:ea typeface="Courier New" pitchFamily="34" charset="-122"/>
+                <a:cs typeface="Courier New" pitchFamily="34" charset="-120"/>
+              </a:rPr>
+              <a:t> </a:t>
+            </a:r>
+            <a:r>
+              <a:rPr lang="en-US" sz="1050" dirty="0">
+                <a:solidFill>
+                  <a:srgbClr val="CCCCCC"/>
+                </a:solidFill>
+                <a:latin typeface="Courier New" pitchFamily="34" charset="0"/>
+                <a:ea typeface="Courier New" pitchFamily="34" charset="-122"/>
+                <a:cs typeface="Courier New" pitchFamily="34" charset="-120"/>
+              </a:rPr>
+              <a:t>}</a:t>
+            </a:r>
+            <a:r>
+              <a:rPr lang="en-US" sz="1050" dirty="0">
+                <a:solidFill>
+                  <a:srgbClr val="CCCCCC"/>
+                </a:solidFill>
+                <a:latin typeface="Courier New" pitchFamily="34" charset="0"/>
+                <a:ea typeface="Courier New" pitchFamily="34" charset="-122"/>
+                <a:cs typeface="Courier New" pitchFamily="34" charset="-120"/>
+              </a:rPr>
+              <a:t>]</a:t>
             </a:r>
             <a:endParaRPr lang="en-US" sz="1050" dirty="0"/>
           </a:p>
@@ -11809,7 +12109,7 @@
                 <a:ea typeface="Courier New" pitchFamily="34" charset="-122"/>
                 <a:cs typeface="Courier New" pitchFamily="34" charset="-120"/>
               </a:rPr>
-              <a:t>#Customer-display</a:t>
+              <a:t>#ZPCCliente-manage</a:t>
             </a:r>
             <a:r>
               <a:rPr lang="en-US" sz="1050" dirty="0">
@@ -11945,7 +12245,26 @@
                   <a:srgbClr val="556B82"/>
                 </a:solidFill>
               </a:rPr>
-              <a:t> com os apps disponíveis para Customer.</a:t>
+              <a:t> com os apps disponíveis para </a:t>
+            </a:r>
+            <a:r>
+              <a:rPr lang="en-US" sz="1050" dirty="0">
+                <a:solidFill>
+                  <a:srgbClr val="0064D9"/>
+                </a:solidFill>
+                <a:latin typeface="Courier New" pitchFamily="34" charset="0"/>
+                <a:ea typeface="Courier New" pitchFamily="34" charset="-122"/>
+                <a:cs typeface="Courier New" pitchFamily="34" charset="-120"/>
+              </a:rPr>
+              <a:t>ZPCCliente</a:t>
+            </a:r>
+            <a:r>
+              <a:rPr lang="en-US" sz="1050" dirty="0">
+                <a:solidFill>
+                  <a:srgbClr val="556B82"/>
+                </a:solidFill>
+              </a:rPr>
+              <a:t>.</a:t>
             </a:r>
             <a:endParaRPr lang="en-US" sz="1400" dirty="0"/>
           </a:p>
@@ -12054,7 +12373,7 @@
                   <a:srgbClr val="556B82"/>
                 </a:solidFill>
               </a:rPr>
-              <a:t>As chaves da linha seguem como parâmetros; </a:t>
+              <a:t>As chaves seguem como parâmetros; </a:t>
             </a:r>
             <a:r>
               <a:rPr lang="en-US" sz="1050" dirty="0">
@@ -12065,7 +12384,7 @@
                 <a:ea typeface="Courier New" pitchFamily="34" charset="-122"/>
                 <a:cs typeface="Courier New" pitchFamily="34" charset="-120"/>
               </a:rPr>
-              <a:t>mapping</a:t>
+              <a:t>additionalBinding</a:t>
             </a:r>
             <a:r>
               <a:rPr lang="en-US" sz="1050" dirty="0">
@@ -12073,7 +12392,45 @@
                   <a:srgbClr val="556B82"/>
                 </a:solidFill>
               </a:rPr>
-              <a:t> renomeia quando preciso.</a:t>
+              <a:t> envia </a:t>
+            </a:r>
+            <a:r>
+              <a:rPr lang="en-US" sz="1050" dirty="0">
+                <a:solidFill>
+                  <a:srgbClr val="0064D9"/>
+                </a:solidFill>
+                <a:latin typeface="Courier New" pitchFamily="34" charset="0"/>
+                <a:ea typeface="Courier New" pitchFamily="34" charset="-122"/>
+                <a:cs typeface="Courier New" pitchFamily="34" charset="-120"/>
+              </a:rPr>
+              <a:t>CpfCliente</a:t>
+            </a:r>
+            <a:r>
+              <a:rPr lang="en-US" sz="1050" dirty="0">
+                <a:solidFill>
+                  <a:srgbClr val="556B82"/>
+                </a:solidFill>
+              </a:rPr>
+              <a:t> como </a:t>
+            </a:r>
+            <a:r>
+              <a:rPr lang="en-US" sz="1050" dirty="0">
+                <a:solidFill>
+                  <a:srgbClr val="0064D9"/>
+                </a:solidFill>
+                <a:latin typeface="Courier New" pitchFamily="34" charset="0"/>
+                <a:ea typeface="Courier New" pitchFamily="34" charset="-122"/>
+                <a:cs typeface="Courier New" pitchFamily="34" charset="-120"/>
+              </a:rPr>
+              <a:t>Cpf</a:t>
+            </a:r>
+            <a:r>
+              <a:rPr lang="en-US" sz="1050" dirty="0">
+                <a:solidFill>
+                  <a:srgbClr val="556B82"/>
+                </a:solidFill>
+              </a:rPr>
+              <a:t>, a chave semântica do cliente.</a:t>
             </a:r>
             <a:endParaRPr lang="en-US" sz="1400" dirty="0"/>
           </a:p>
